--- a/presentations/methode/en/methode.en.pptx
+++ b/presentations/methode/en/methode.en.pptx
@@ -6174,7 +6174,7 @@
                 <a:ea typeface="Fraunces" pitchFamily="34" charset="-122"/>
                 <a:cs typeface="Fraunces" pitchFamily="34" charset="-120"/>
               </a:rPr>
-              <a:t>The scale follows the tier; the hard rule does not move</a:t>
+              <a:t>What the scale gives you, tier by tier</a:t>
             </a:r>
             <a:endParaRPr lang="en-US" sz="3400" dirty="0"/>
           </a:p>
@@ -6217,7 +6217,7 @@
                 <a:ea typeface="Inter" pitchFamily="34" charset="-122"/>
                 <a:cs typeface="Inter" pitchFamily="34" charset="-120"/>
               </a:rPr>
-              <a:t>Public and Basic: qualitative diagnosis, low → critical.</a:t>
+              <a:t>Public and Basic — a qualitative diagnosis, low → critical: enough to place a corridor and compare it to another.</a:t>
             </a:r>
             <a:endParaRPr lang="en-US" sz="1500" dirty="0"/>
           </a:p>
@@ -6238,7 +6238,7 @@
                 <a:ea typeface="Inter" pitchFamily="34" charset="-122"/>
                 <a:cs typeface="Inter" pitchFamily="34" charset="-120"/>
               </a:rPr>
-              <a:t>Standard: 0–5 score per dimension, plus a qualitative overall level.</a:t>
+              <a:t>Standard — a 0–5 score per dimension: enough to see WHERE the vulnerability sits, and therefore what to act on.</a:t>
             </a:r>
             <a:endParaRPr lang="en-US" sz="1500" dirty="0"/>
           </a:p>
@@ -6259,7 +6259,7 @@
                 <a:ea typeface="Inter" pitchFamily="34" charset="-122"/>
                 <a:cs typeface="Inter" pitchFamily="34" charset="-120"/>
               </a:rPr>
-              <a:t>Premium: aggregate 0–100 score, only where the methodology is documented.</a:t>
+              <a:t>Premium — an aggregate 0–100 score, weighted for the client’s context, once the methodology is documented.</a:t>
             </a:r>
             <a:endParaRPr lang="en-US" sz="1500" dirty="0"/>
           </a:p>
@@ -6280,7 +6280,7 @@
                 <a:ea typeface="Inter" pitchFamily="34" charset="-122"/>
                 <a:cs typeface="Inter" pitchFamily="34" charset="-120"/>
               </a:rPr>
-              <a:t>Every score carries its sources, its date, its confidence level and its uncertainties.</a:t>
+              <a:t>At every tier, each score carries its sources, its date, its confidence level and its uncertainties.</a:t>
             </a:r>
             <a:endParaRPr lang="en-US" sz="1500" dirty="0"/>
           </a:p>

--- a/presentations/methode/en/methode.en.pptx
+++ b/presentations/methode/en/methode.en.pptx
@@ -217,10 +217,10 @@
                     <c:v>Energy infrastructure</c:v>
                   </c:pt>
                   <c:pt idx="6">
-                    <c:v>Other infrastructure</c:v>
+                    <c:v>Air-cargo gateways</c:v>
                   </c:pt>
                   <c:pt idx="7">
-                    <c:v>Air-cargo gateways</c:v>
+                    <c:v>Other infrastructure</c:v>
                   </c:pt>
                   <c:pt idx="8">
                     <c:v>Strategic systems</c:v>
@@ -236,13 +236,13 @@
                 <c:formatCode>General</c:formatCode>
                 <c:ptCount val="9"/>
                 <c:pt idx="0">
-                  <c:v>75</c:v>
+                  <c:v>77</c:v>
                 </c:pt>
                 <c:pt idx="1">
-                  <c:v>51</c:v>
+                  <c:v>53</c:v>
                 </c:pt>
                 <c:pt idx="2">
-                  <c:v>45</c:v>
+                  <c:v>49</c:v>
                 </c:pt>
                 <c:pt idx="3">
                   <c:v>36</c:v>
@@ -251,16 +251,16 @@
                   <c:v>32</c:v>
                 </c:pt>
                 <c:pt idx="5">
-                  <c:v>26</c:v>
+                  <c:v>28</c:v>
                 </c:pt>
                 <c:pt idx="6">
+                  <c:v>28</c:v>
+                </c:pt>
+                <c:pt idx="7">
                   <c:v>23</c:v>
                 </c:pt>
-                <c:pt idx="7">
-                  <c:v>18</c:v>
-                </c:pt>
                 <c:pt idx="8">
-                  <c:v>7</c:v>
+                  <c:v>8</c:v>
                 </c:pt>
               </c:numCache>
             </c:numRef>
@@ -4244,7 +4244,7 @@
                 <a:ea typeface="IBM Plex Mono" pitchFamily="34" charset="-122"/>
                 <a:cs typeface="IBM Plex Mono" pitchFamily="34" charset="-120"/>
               </a:rPr>
-              <a:t>METHOD · EN · 2026-08-10</a:t>
+              <a:t>METHOD · EN · 2026-08-21</a:t>
             </a:r>
             <a:endParaRPr lang="en-US" sz="1000" dirty="0"/>
           </a:p>
@@ -5698,7 +5698,7 @@
                 <a:ea typeface="Inter" pitchFamily="34" charset="-122"/>
                 <a:cs typeface="Inter" pitchFamily="34" charset="-120"/>
               </a:rPr>
-              <a:t>As of 2026-08-10: 6 instructed corridors out of 313 carry all eight dimensions, 268 carry only three, and every one of them sits in the top band. The grid discriminates in principle; the base does not discriminate yet in fact.</a:t>
+              <a:t>As of 2026-08-21: the 334 instructed corridors occupy all four bands (127 / 137 / 65 / 5) — six weeks earlier the base discriminated across ONE. It distinguishes better because it asserts less: the concentration dimension was withdrawn from objects with no substitution study, and 275 corridors out of 334 now carry only two dimensions.</a:t>
             </a:r>
             <a:endParaRPr lang="en-US" sz="1500" dirty="0"/>
           </a:p>
@@ -20382,7 +20382,7 @@
                 <a:ea typeface="Fraunces" pitchFamily="34" charset="-122"/>
                 <a:cs typeface="Fraunces" pitchFamily="34" charset="-120"/>
               </a:rPr>
-              <a:t>313</a:t>
+              <a:t>334</a:t>
             </a:r>
             <a:endParaRPr lang="en-US" sz="5400" dirty="0"/>
           </a:p>
@@ -20525,7 +20525,7 @@
                 <a:ea typeface="Fraunces" pitchFamily="34" charset="-122"/>
                 <a:cs typeface="Fraunces" pitchFamily="34" charset="-120"/>
               </a:rPr>
-              <a:t>190</a:t>
+              <a:t>330</a:t>
             </a:r>
             <a:endParaRPr lang="en-US" sz="5400" dirty="0"/>
           </a:p>
@@ -20788,7 +20788,7 @@
                 <a:ea typeface="Inter" pitchFamily="34" charset="-122"/>
                 <a:cs typeface="Inter" pitchFamily="34" charset="-120"/>
               </a:rPr>
-              <a:t>Catalogued is not validated: promoting an object to P0 requires sourced evidence and human validation. 30 objects are there today. That figure describes the instructed corpus — the base also serves 2,218 objects, most of which have had no analytical treatment at all.</a:t>
+              <a:t>Catalogued is not validated: promoting an object to P0 requires sourced evidence and human validation. 30 objects are there today. That figure describes the instructed corpus — the base also serves 2,239 objects, most of which have had no analytical treatment at all.</a:t>
             </a:r>
             <a:endParaRPr lang="en-US" sz="1000" dirty="0"/>
           </a:p>
@@ -21380,7 +21380,7 @@
                 <a:ea typeface="IBM Plex Mono" pitchFamily="34" charset="-122"/>
                 <a:cs typeface="IBM Plex Mono" pitchFamily="34" charset="-120"/>
               </a:rPr>
-              <a:t>190</a:t>
+              <a:t>330</a:t>
             </a:r>
             <a:endParaRPr lang="en-US" sz="1200" dirty="0"/>
           </a:p>
@@ -21536,7 +21536,7 @@
                 <a:ea typeface="IBM Plex Mono" pitchFamily="34" charset="-122"/>
                 <a:cs typeface="IBM Plex Mono" pitchFamily="34" charset="-120"/>
               </a:rPr>
-              <a:t>90</a:t>
+              <a:t>126</a:t>
             </a:r>
             <a:endParaRPr lang="en-US" sz="1200" dirty="0"/>
           </a:p>
@@ -21614,7 +21614,7 @@
                 <a:ea typeface="IBM Plex Mono" pitchFamily="34" charset="-122"/>
                 <a:cs typeface="IBM Plex Mono" pitchFamily="34" charset="-120"/>
               </a:rPr>
-              <a:t>70</a:t>
+              <a:t>92</a:t>
             </a:r>
             <a:endParaRPr lang="en-US" sz="1200" dirty="0"/>
           </a:p>
@@ -21692,7 +21692,7 @@
                 <a:ea typeface="IBM Plex Mono" pitchFamily="34" charset="-122"/>
                 <a:cs typeface="IBM Plex Mono" pitchFamily="34" charset="-120"/>
               </a:rPr>
-              <a:t>0.18.0</a:t>
+              <a:t>4.0.0</a:t>
             </a:r>
             <a:endParaRPr lang="en-US" sz="1200" dirty="0"/>
           </a:p>
